--- a/dist/초3/국어/문학과매체/초3_국어_문학과매체_02_감각적표현.pptx
+++ b/dist/초3/국어/문학과매체/초3_국어_문학과매체_02_감각적표현.pptx
@@ -120,13 +120,13 @@
   <p:extLst>
     <p:ext uri="{521415D9-36F7-43E2-AB2F-B90AF26B5E84}">
       <p14:sectionLst xmlns:p14="http://schemas.microsoft.com/office/powerpoint/2010/main">
-        <p14:section name="도입" id="{9886908b-6521-884c-b3b5-7fe890365e71}">
+        <p14:section name="도입" id="{829821ab-4f8f-bc6f-00be-d93377e134b3}">
           <p14:sldIdLst>
             <p14:sldId id="256"/>
             <p14:sldId id="257"/>
           </p14:sldIdLst>
         </p14:section>
-        <p14:section name="개념" id="{3dbf5268-ee30-be44-ba4b-93a01c22015c}">
+        <p14:section name="개념" id="{91b9b1e8-9fc3-8680-a464-c162b36d541e}">
           <p14:sldIdLst>
             <p14:sldId id="258"/>
             <p14:sldId id="259"/>
@@ -134,26 +134,26 @@
             <p14:sldId id="261"/>
           </p14:sldIdLst>
         </p14:section>
-        <p14:section name="연습" id="{856c0c51-976f-5b42-6729-b732c052fa03}">
+        <p14:section name="연습" id="{7e9ccc7f-fad1-b27e-c183-c626a25faee0}">
           <p14:sldIdLst>
             <p14:sldId id="262"/>
             <p14:sldId id="263"/>
             <p14:sldId id="264"/>
           </p14:sldIdLst>
         </p14:section>
-        <p14:section name="확인" id="{b7a1c31a-79dd-0d3d-97a0-4d9c3505e443}">
+        <p14:section name="확인" id="{463c38c9-6ead-877d-48aa-6e1806737199}">
           <p14:sldIdLst>
             <p14:sldId id="265"/>
             <p14:sldId id="266"/>
             <p14:sldId id="267"/>
           </p14:sldIdLst>
         </p14:section>
-        <p14:section name="정리" id="{0f1386ea-981a-7825-2fd4-895fb3fded6a}">
+        <p14:section name="정리" id="{1e2efd4b-9930-cdb2-5f75-dad0c330672f}">
           <p14:sldIdLst>
             <p14:sldId id="268"/>
           </p14:sldIdLst>
         </p14:section>
-        <p14:section name="보충" id="{fd672bcb-eaf6-00b9-5684-1f10da6c0bd4}">
+        <p14:section name="보충" id="{85c4046a-04ef-bfe2-2faf-dcd5c8a695ab}">
           <p14:sldIdLst>
             <p14:sldId id="269"/>
           </p14:sldIdLst>
